--- a/AutomaTivio/saida/2026-09/pptx/Tivio RF CP - Relatório de Gestão - Setembro 2026.pptx
+++ b/AutomaTivio/saida/2026-09/pptx/Tivio RF CP - Relatório de Gestão - Setembro 2026.pptx
@@ -5066,7 +5066,7 @@
         <p:spPr>
           <a:xfrm>
             <a:off x="2960448" y="8437078"/>
-            <a:ext cx="435503" cy="143640"/>
+            <a:ext cx="435380" cy="143640"/>
           </a:xfrm>
           <a:prstGeom prst="rect">
             <a:avLst/>
@@ -5089,7 +5089,7 @@
                 </a:solidFill>
                 <a:latin typeface="Versos"/>
               </a:rPr>
-              <a:t>41,22%</a:t>
+              <a:t>42,51%</a:t>
             </a:r>
           </a:p>
         </p:txBody>
@@ -5126,7 +5126,7 @@
                 </a:solidFill>
                 <a:latin typeface="Versos"/>
               </a:rPr>
-              <a:t>AA+</a:t>
+              <a:t>AA-</a:t>
             </a:r>
           </a:p>
         </p:txBody>
@@ -5139,8 +5139,8 @@
         </p:nvSpPr>
         <p:spPr>
           <a:xfrm>
-            <a:off x="1190345" y="8715380"/>
-            <a:ext cx="355036" cy="143640"/>
+            <a:off x="1196133" y="8715380"/>
+            <a:ext cx="396191" cy="143640"/>
           </a:xfrm>
           <a:prstGeom prst="rect">
             <a:avLst/>
@@ -5163,7 +5163,7 @@
                 </a:solidFill>
                 <a:latin typeface="Versos"/>
               </a:rPr>
-              <a:t>3,16%</a:t>
+              <a:t>3,39%</a:t>
             </a:r>
           </a:p>
         </p:txBody>
@@ -5200,7 +5200,7 @@
                 </a:solidFill>
                 <a:latin typeface="Versos"/>
               </a:rPr>
-              <a:t>A</a:t>
+              <a:t>AA+</a:t>
             </a:r>
           </a:p>
         </p:txBody>
@@ -5213,8 +5213,8 @@
         </p:nvSpPr>
         <p:spPr>
           <a:xfrm>
-            <a:off x="1180068" y="8993801"/>
-            <a:ext cx="388451" cy="143640"/>
+            <a:off x="1187983" y="8993801"/>
+            <a:ext cx="356387" cy="143640"/>
           </a:xfrm>
           <a:prstGeom prst="rect">
             <a:avLst/>
@@ -5237,7 +5237,7 @@
                 </a:solidFill>
                 <a:latin typeface="Versos"/>
               </a:rPr>
-              <a:t>2,94%</a:t>
+              <a:t>3,21%</a:t>
             </a:r>
           </a:p>
         </p:txBody>
@@ -5274,7 +5274,7 @@
                 </a:solidFill>
                 <a:latin typeface="Versos"/>
               </a:rPr>
-              <a:t>AA-</a:t>
+              <a:t>A</a:t>
             </a:r>
           </a:p>
         </p:txBody>
@@ -5287,8 +5287,8 @@
         </p:nvSpPr>
         <p:spPr>
           <a:xfrm>
-            <a:off x="1170028" y="9272103"/>
-            <a:ext cx="381572" cy="143640"/>
+            <a:off x="1175934" y="9272103"/>
+            <a:ext cx="388451" cy="143640"/>
           </a:xfrm>
           <a:prstGeom prst="rect">
             <a:avLst/>
@@ -5311,7 +5311,7 @@
                 </a:solidFill>
                 <a:latin typeface="Versos"/>
               </a:rPr>
-              <a:t>2,73%</a:t>
+              <a:t>2,94%</a:t>
             </a:r>
           </a:p>
         </p:txBody>
@@ -5361,7 +5361,7 @@
         </p:nvSpPr>
         <p:spPr>
           <a:xfrm>
-            <a:off x="1140969" y="9550406"/>
+            <a:off x="1137898" y="9550406"/>
             <a:ext cx="356756" cy="143640"/>
           </a:xfrm>
           <a:prstGeom prst="rect">
@@ -5435,7 +5435,7 @@
         </p:nvSpPr>
         <p:spPr>
           <a:xfrm>
-            <a:off x="1105531" y="9828708"/>
+            <a:off x="1103641" y="9828708"/>
             <a:ext cx="359213" cy="143640"/>
           </a:xfrm>
           <a:prstGeom prst="rect">
@@ -5509,7 +5509,7 @@
         </p:nvSpPr>
         <p:spPr>
           <a:xfrm>
-            <a:off x="3802680" y="5564041"/>
+            <a:off x="3802680" y="5554473"/>
             <a:ext cx="1603929" cy="120960"/>
           </a:xfrm>
           <a:prstGeom prst="rect">
@@ -5546,7 +5546,7 @@
         </p:nvSpPr>
         <p:spPr>
           <a:xfrm>
-            <a:off x="6752497" y="5556245"/>
+            <a:off x="6752497" y="5546795"/>
             <a:ext cx="465478" cy="143640"/>
           </a:xfrm>
           <a:prstGeom prst="rect">
@@ -5583,7 +5583,7 @@
         </p:nvSpPr>
         <p:spPr>
           <a:xfrm>
-            <a:off x="3802680" y="5868213"/>
+            <a:off x="3802680" y="5839745"/>
             <a:ext cx="1603929" cy="120960"/>
           </a:xfrm>
           <a:prstGeom prst="rect">
@@ -5620,7 +5620,7 @@
         </p:nvSpPr>
         <p:spPr>
           <a:xfrm>
-            <a:off x="6550976" y="5860535"/>
+            <a:off x="6550976" y="5831949"/>
             <a:ext cx="469409" cy="143640"/>
           </a:xfrm>
           <a:prstGeom prst="rect">
@@ -5657,7 +5657,7 @@
         </p:nvSpPr>
         <p:spPr>
           <a:xfrm>
-            <a:off x="3802680" y="6172503"/>
+            <a:off x="3802680" y="6124899"/>
             <a:ext cx="1603929" cy="120960"/>
           </a:xfrm>
           <a:prstGeom prst="rect">
@@ -5694,8 +5694,8 @@
         </p:nvSpPr>
         <p:spPr>
           <a:xfrm>
-            <a:off x="5668346" y="6164707"/>
-            <a:ext cx="398648" cy="143640"/>
+            <a:off x="5677441" y="6117221"/>
+            <a:ext cx="396436" cy="143640"/>
           </a:xfrm>
           <a:prstGeom prst="rect">
             <a:avLst/>
@@ -5718,7 +5718,7 @@
                 </a:solidFill>
                 <a:latin typeface="Versos"/>
               </a:rPr>
-              <a:t>6,09%</a:t>
+              <a:t>6,39%</a:t>
             </a:r>
           </a:p>
         </p:txBody>
@@ -5731,7 +5731,7 @@
         </p:nvSpPr>
         <p:spPr>
           <a:xfrm>
-            <a:off x="3802680" y="6476675"/>
+            <a:off x="3802680" y="6410171"/>
             <a:ext cx="1603929" cy="120960"/>
           </a:xfrm>
           <a:prstGeom prst="rect">
@@ -5768,7 +5768,7 @@
         </p:nvSpPr>
         <p:spPr>
           <a:xfrm>
-            <a:off x="5571956" y="6468997"/>
+            <a:off x="5571956" y="6402375"/>
             <a:ext cx="391154" cy="143640"/>
           </a:xfrm>
           <a:prstGeom prst="rect">
@@ -5805,7 +5805,81 @@
         </p:nvSpPr>
         <p:spPr>
           <a:xfrm>
-            <a:off x="3802680" y="6780965"/>
+            <a:off x="3802680" y="6638861"/>
+            <a:ext cx="1542240" cy="234005"/>
+          </a:xfrm>
+          <a:prstGeom prst="rect">
+            <a:avLst/>
+          </a:prstGeom>
+          <a:noFill/>
+        </p:spPr>
+        <p:txBody>
+          <a:bodyPr wrap="square" lIns="0" rIns="0" tIns="0" bIns="0" anchor="t"/>
+          <a:lstStyle/>
+          <a:p>
+            <a:pPr algn="r">
+              <a:lnSpc>
+                <a:spcPts val="890"/>
+              </a:lnSpc>
+            </a:pPr>
+            <a:r>
+              <a:rPr sz="809" b="0" i="0">
+                <a:solidFill>
+                  <a:srgbClr val="222222"/>
+                </a:solidFill>
+                <a:latin typeface="Versos"/>
+              </a:rPr>
+              <a:t>Comércio atacadista e varejista</a:t>
+            </a:r>
+          </a:p>
+        </p:txBody>
+      </p:sp>
+      <p:sp>
+        <p:nvSpPr>
+          <p:cNvPr id="76" name="TextBox 75"/>
+          <p:cNvSpPr txBox="1"/>
+          <p:nvPr/>
+        </p:nvSpPr>
+        <p:spPr>
+          <a:xfrm>
+            <a:off x="5544787" y="6687646"/>
+            <a:ext cx="323955" cy="143640"/>
+          </a:xfrm>
+          <a:prstGeom prst="rect">
+            <a:avLst/>
+          </a:prstGeom>
+          <a:noFill/>
+        </p:spPr>
+        <p:txBody>
+          <a:bodyPr wrap="none" lIns="0" rIns="0" tIns="0" bIns="0" anchor="t"/>
+          <a:lstStyle/>
+          <a:p>
+            <a:pPr algn="l">
+              <a:lnSpc>
+                <a:spcPts val="1142"/>
+              </a:lnSpc>
+            </a:pPr>
+            <a:r>
+              <a:rPr sz="952" b="0" i="0">
+                <a:solidFill>
+                  <a:srgbClr val="111111"/>
+                </a:solidFill>
+                <a:latin typeface="Versos"/>
+              </a:rPr>
+              <a:t>1,91%</a:t>
+            </a:r>
+          </a:p>
+        </p:txBody>
+      </p:sp>
+      <p:sp>
+        <p:nvSpPr>
+          <p:cNvPr id="77" name="TextBox 76"/>
+          <p:cNvSpPr txBox="1"/>
+          <p:nvPr/>
+        </p:nvSpPr>
+        <p:spPr>
+          <a:xfrm>
+            <a:off x="3802680" y="6980596"/>
             <a:ext cx="1603929" cy="120960"/>
           </a:xfrm>
           <a:prstGeom prst="rect">
@@ -5836,13 +5910,13 @@
       </p:sp>
       <p:sp>
         <p:nvSpPr>
-          <p:cNvPr id="76" name="TextBox 75"/>
-          <p:cNvSpPr txBox="1"/>
-          <p:nvPr/>
-        </p:nvSpPr>
-        <p:spPr>
-          <a:xfrm>
-            <a:off x="5540771" y="6773169"/>
+          <p:cNvPr id="78" name="TextBox 77"/>
+          <p:cNvSpPr txBox="1"/>
+          <p:nvPr/>
+        </p:nvSpPr>
+        <p:spPr>
+          <a:xfrm>
+            <a:off x="5540771" y="6972800"/>
             <a:ext cx="346805" cy="143640"/>
           </a:xfrm>
           <a:prstGeom prst="rect">
@@ -5873,13 +5947,13 @@
       </p:sp>
       <p:sp>
         <p:nvSpPr>
-          <p:cNvPr id="77" name="TextBox 76"/>
-          <p:cNvSpPr txBox="1"/>
-          <p:nvPr/>
-        </p:nvSpPr>
-        <p:spPr>
-          <a:xfrm>
-            <a:off x="3802680" y="7085137"/>
+          <p:cNvPr id="79" name="TextBox 78"/>
+          <p:cNvSpPr txBox="1"/>
+          <p:nvPr/>
+        </p:nvSpPr>
+        <p:spPr>
+          <a:xfrm>
+            <a:off x="3802680" y="7265750"/>
             <a:ext cx="1603929" cy="120960"/>
           </a:xfrm>
           <a:prstGeom prst="rect">
@@ -5910,13 +5984,13 @@
       </p:sp>
       <p:sp>
         <p:nvSpPr>
-          <p:cNvPr id="78" name="TextBox 77"/>
-          <p:cNvSpPr txBox="1"/>
-          <p:nvPr/>
-        </p:nvSpPr>
-        <p:spPr>
-          <a:xfrm>
-            <a:off x="5538645" y="7077459"/>
+          <p:cNvPr id="80" name="TextBox 79"/>
+          <p:cNvSpPr txBox="1"/>
+          <p:nvPr/>
+        </p:nvSpPr>
+        <p:spPr>
+          <a:xfrm>
+            <a:off x="5538645" y="7258072"/>
             <a:ext cx="364741" cy="143640"/>
           </a:xfrm>
           <a:prstGeom prst="rect">
@@ -5947,13 +6021,13 @@
       </p:sp>
       <p:sp>
         <p:nvSpPr>
-          <p:cNvPr id="79" name="TextBox 78"/>
-          <p:cNvSpPr txBox="1"/>
-          <p:nvPr/>
-        </p:nvSpPr>
-        <p:spPr>
-          <a:xfrm>
-            <a:off x="3802680" y="7389427"/>
+          <p:cNvPr id="81" name="TextBox 80"/>
+          <p:cNvSpPr txBox="1"/>
+          <p:nvPr/>
+        </p:nvSpPr>
+        <p:spPr>
+          <a:xfrm>
+            <a:off x="3802680" y="7551022"/>
             <a:ext cx="1603929" cy="120960"/>
           </a:xfrm>
           <a:prstGeom prst="rect">
@@ -5984,13 +6058,13 @@
       </p:sp>
       <p:sp>
         <p:nvSpPr>
-          <p:cNvPr id="80" name="TextBox 79"/>
-          <p:cNvSpPr txBox="1"/>
-          <p:nvPr/>
-        </p:nvSpPr>
-        <p:spPr>
-          <a:xfrm>
-            <a:off x="5537936" y="7381631"/>
+          <p:cNvPr id="82" name="TextBox 81"/>
+          <p:cNvSpPr txBox="1"/>
+          <p:nvPr/>
+        </p:nvSpPr>
+        <p:spPr>
+          <a:xfrm>
+            <a:off x="5537936" y="7543226"/>
             <a:ext cx="364618" cy="143640"/>
           </a:xfrm>
           <a:prstGeom prst="rect">
@@ -6021,22 +6095,22 @@
       </p:sp>
       <p:sp>
         <p:nvSpPr>
-          <p:cNvPr id="81" name="TextBox 80"/>
-          <p:cNvSpPr txBox="1"/>
-          <p:nvPr/>
-        </p:nvSpPr>
-        <p:spPr>
-          <a:xfrm>
-            <a:off x="3802680" y="7637135"/>
-            <a:ext cx="1542240" cy="234005"/>
-          </a:xfrm>
-          <a:prstGeom prst="rect">
-            <a:avLst/>
-          </a:prstGeom>
-          <a:noFill/>
-        </p:spPr>
-        <p:txBody>
-          <a:bodyPr wrap="square" lIns="0" rIns="0" tIns="0" bIns="0" anchor="t"/>
+          <p:cNvPr id="83" name="TextBox 82"/>
+          <p:cNvSpPr txBox="1"/>
+          <p:nvPr/>
+        </p:nvSpPr>
+        <p:spPr>
+          <a:xfrm>
+            <a:off x="3802680" y="7836176"/>
+            <a:ext cx="1603929" cy="120960"/>
+          </a:xfrm>
+          <a:prstGeom prst="rect">
+            <a:avLst/>
+          </a:prstGeom>
+          <a:noFill/>
+        </p:spPr>
+        <p:txBody>
+          <a:bodyPr wrap="none" lIns="0" rIns="0" tIns="0" bIns="0" anchor="t"/>
           <a:lstStyle/>
           <a:p>
             <a:pPr algn="r">
@@ -6051,21 +6125,21 @@
                 </a:solidFill>
                 <a:latin typeface="Versos"/>
               </a:rPr>
-              <a:t>Comércio atacadista e varejista</a:t>
-            </a:r>
-          </a:p>
-        </p:txBody>
-      </p:sp>
-      <p:sp>
-        <p:nvSpPr>
-          <p:cNvPr id="82" name="TextBox 81"/>
-          <p:cNvSpPr txBox="1"/>
-          <p:nvPr/>
-        </p:nvSpPr>
-        <p:spPr>
-          <a:xfrm>
-            <a:off x="5528486" y="7685921"/>
-            <a:ext cx="358230" cy="143640"/>
+              <a:t>Educação</a:t>
+            </a:r>
+          </a:p>
+        </p:txBody>
+      </p:sp>
+      <p:sp>
+        <p:nvSpPr>
+          <p:cNvPr id="84" name="TextBox 83"/>
+          <p:cNvSpPr txBox="1"/>
+          <p:nvPr/>
+        </p:nvSpPr>
+        <p:spPr>
+          <a:xfrm>
+            <a:off x="5528013" y="7828498"/>
+            <a:ext cx="359213" cy="143640"/>
           </a:xfrm>
           <a:prstGeom prst="rect">
             <a:avLst/>
@@ -6088,20 +6162,20 @@
                 </a:solidFill>
                 <a:latin typeface="Versos"/>
               </a:rPr>
-              <a:t>1,35%</a:t>
-            </a:r>
-          </a:p>
-        </p:txBody>
-      </p:sp>
-      <p:sp>
-        <p:nvSpPr>
-          <p:cNvPr id="83" name="TextBox 82"/>
-          <p:cNvSpPr txBox="1"/>
-          <p:nvPr/>
-        </p:nvSpPr>
-        <p:spPr>
-          <a:xfrm>
-            <a:off x="3802680" y="7997889"/>
+              <a:t>1,34%</a:t>
+            </a:r>
+          </a:p>
+        </p:txBody>
+      </p:sp>
+      <p:sp>
+        <p:nvSpPr>
+          <p:cNvPr id="85" name="TextBox 84"/>
+          <p:cNvSpPr txBox="1"/>
+          <p:nvPr/>
+        </p:nvSpPr>
+        <p:spPr>
+          <a:xfrm>
+            <a:off x="3802680" y="8121448"/>
             <a:ext cx="1603929" cy="120960"/>
           </a:xfrm>
           <a:prstGeom prst="rect">
@@ -6125,21 +6199,21 @@
                 </a:solidFill>
                 <a:latin typeface="Versos"/>
               </a:rPr>
-              <a:t>Educação</a:t>
-            </a:r>
-          </a:p>
-        </p:txBody>
-      </p:sp>
-      <p:sp>
-        <p:nvSpPr>
-          <p:cNvPr id="84" name="TextBox 83"/>
-          <p:cNvSpPr txBox="1"/>
-          <p:nvPr/>
-        </p:nvSpPr>
-        <p:spPr>
-          <a:xfrm>
-            <a:off x="5528013" y="7990093"/>
-            <a:ext cx="359213" cy="143640"/>
+              <a:t>Distribuição</a:t>
+            </a:r>
+          </a:p>
+        </p:txBody>
+      </p:sp>
+      <p:sp>
+        <p:nvSpPr>
+          <p:cNvPr id="86" name="TextBox 85"/>
+          <p:cNvSpPr txBox="1"/>
+          <p:nvPr/>
+        </p:nvSpPr>
+        <p:spPr>
+          <a:xfrm>
+            <a:off x="5512775" y="8113651"/>
+            <a:ext cx="394839" cy="143640"/>
           </a:xfrm>
           <a:prstGeom prst="rect">
             <a:avLst/>
@@ -6162,20 +6236,20 @@
                 </a:solidFill>
                 <a:latin typeface="Versos"/>
               </a:rPr>
-              <a:t>1,34%</a:t>
-            </a:r>
-          </a:p>
-        </p:txBody>
-      </p:sp>
-      <p:sp>
-        <p:nvSpPr>
-          <p:cNvPr id="85" name="TextBox 84"/>
-          <p:cNvSpPr txBox="1"/>
-          <p:nvPr/>
-        </p:nvSpPr>
-        <p:spPr>
-          <a:xfrm>
-            <a:off x="3802680" y="8302061"/>
+              <a:t>0,82%</a:t>
+            </a:r>
+          </a:p>
+        </p:txBody>
+      </p:sp>
+      <p:sp>
+        <p:nvSpPr>
+          <p:cNvPr id="87" name="TextBox 86"/>
+          <p:cNvSpPr txBox="1"/>
+          <p:nvPr/>
+        </p:nvSpPr>
+        <p:spPr>
+          <a:xfrm>
+            <a:off x="3802680" y="8406601"/>
             <a:ext cx="1603929" cy="120960"/>
           </a:xfrm>
           <a:prstGeom prst="rect">
@@ -6199,21 +6273,21 @@
                 </a:solidFill>
                 <a:latin typeface="Versos"/>
               </a:rPr>
-              <a:t>Distribuição</a:t>
-            </a:r>
-          </a:p>
-        </p:txBody>
-      </p:sp>
-      <p:sp>
-        <p:nvSpPr>
-          <p:cNvPr id="86" name="TextBox 85"/>
-          <p:cNvSpPr txBox="1"/>
-          <p:nvPr/>
-        </p:nvSpPr>
-        <p:spPr>
-          <a:xfrm>
-            <a:off x="5512775" y="8294383"/>
-            <a:ext cx="394839" cy="143640"/>
+              <a:t>Petróleo e Gás</a:t>
+            </a:r>
+          </a:p>
+        </p:txBody>
+      </p:sp>
+      <p:sp>
+        <p:nvSpPr>
+          <p:cNvPr id="88" name="TextBox 87"/>
+          <p:cNvSpPr txBox="1"/>
+          <p:nvPr/>
+        </p:nvSpPr>
+        <p:spPr>
+          <a:xfrm>
+            <a:off x="5511830" y="8398923"/>
+            <a:ext cx="386731" cy="143640"/>
           </a:xfrm>
           <a:prstGeom prst="rect">
             <a:avLst/>
@@ -6236,20 +6310,20 @@
                 </a:solidFill>
                 <a:latin typeface="Versos"/>
               </a:rPr>
-              <a:t>0,82%</a:t>
-            </a:r>
-          </a:p>
-        </p:txBody>
-      </p:sp>
-      <p:sp>
-        <p:nvSpPr>
-          <p:cNvPr id="87" name="TextBox 86"/>
-          <p:cNvSpPr txBox="1"/>
-          <p:nvPr/>
-        </p:nvSpPr>
-        <p:spPr>
-          <a:xfrm>
-            <a:off x="3802680" y="8606351"/>
+              <a:t>0,79%</a:t>
+            </a:r>
+          </a:p>
+        </p:txBody>
+      </p:sp>
+      <p:sp>
+        <p:nvSpPr>
+          <p:cNvPr id="89" name="TextBox 88"/>
+          <p:cNvSpPr txBox="1"/>
+          <p:nvPr/>
+        </p:nvSpPr>
+        <p:spPr>
+          <a:xfrm>
+            <a:off x="3802680" y="8691873"/>
             <a:ext cx="1603929" cy="120960"/>
           </a:xfrm>
           <a:prstGeom prst="rect">
@@ -6273,6 +6347,80 @@
                 </a:solidFill>
                 <a:latin typeface="Versos"/>
               </a:rPr>
+              <a:t>TI e Telecomunicações</a:t>
+            </a:r>
+          </a:p>
+        </p:txBody>
+      </p:sp>
+      <p:sp>
+        <p:nvSpPr>
+          <p:cNvPr id="90" name="TextBox 89"/>
+          <p:cNvSpPr txBox="1"/>
+          <p:nvPr/>
+        </p:nvSpPr>
+        <p:spPr>
+          <a:xfrm>
+            <a:off x="5509468" y="8684077"/>
+            <a:ext cx="354176" cy="143640"/>
+          </a:xfrm>
+          <a:prstGeom prst="rect">
+            <a:avLst/>
+          </a:prstGeom>
+          <a:noFill/>
+        </p:spPr>
+        <p:txBody>
+          <a:bodyPr wrap="none" lIns="0" rIns="0" tIns="0" bIns="0" anchor="t"/>
+          <a:lstStyle/>
+          <a:p>
+            <a:pPr algn="l">
+              <a:lnSpc>
+                <a:spcPts val="1142"/>
+              </a:lnSpc>
+            </a:pPr>
+            <a:r>
+              <a:rPr sz="952" b="0" i="0">
+                <a:solidFill>
+                  <a:srgbClr val="111111"/>
+                </a:solidFill>
+                <a:latin typeface="Versos"/>
+              </a:rPr>
+              <a:t>0,71%</a:t>
+            </a:r>
+          </a:p>
+        </p:txBody>
+      </p:sp>
+      <p:sp>
+        <p:nvSpPr>
+          <p:cNvPr id="91" name="TextBox 90"/>
+          <p:cNvSpPr txBox="1"/>
+          <p:nvPr/>
+        </p:nvSpPr>
+        <p:spPr>
+          <a:xfrm>
+            <a:off x="3802680" y="8977145"/>
+            <a:ext cx="1603929" cy="120960"/>
+          </a:xfrm>
+          <a:prstGeom prst="rect">
+            <a:avLst/>
+          </a:prstGeom>
+          <a:noFill/>
+        </p:spPr>
+        <p:txBody>
+          <a:bodyPr wrap="none" lIns="0" rIns="0" tIns="0" bIns="0" anchor="t"/>
+          <a:lstStyle/>
+          <a:p>
+            <a:pPr algn="r">
+              <a:lnSpc>
+                <a:spcPts val="890"/>
+              </a:lnSpc>
+            </a:pPr>
+            <a:r>
+              <a:rPr sz="809" b="0" i="0">
+                <a:solidFill>
+                  <a:srgbClr val="222222"/>
+                </a:solidFill>
+                <a:latin typeface="Versos"/>
+              </a:rPr>
               <a:t>Indústria e Comércio</a:t>
             </a:r>
           </a:p>
@@ -6280,13 +6428,13 @@
       </p:sp>
       <p:sp>
         <p:nvSpPr>
-          <p:cNvPr id="88" name="TextBox 87"/>
-          <p:cNvSpPr txBox="1"/>
-          <p:nvPr/>
-        </p:nvSpPr>
-        <p:spPr>
-          <a:xfrm>
-            <a:off x="5509231" y="8598555"/>
+          <p:cNvPr id="92" name="TextBox 91"/>
+          <p:cNvSpPr txBox="1"/>
+          <p:nvPr/>
+        </p:nvSpPr>
+        <p:spPr>
+          <a:xfrm>
+            <a:off x="5509231" y="8969349"/>
             <a:ext cx="389311" cy="143640"/>
           </a:xfrm>
           <a:prstGeom prst="rect">
@@ -6317,13 +6465,13 @@
       </p:sp>
       <p:sp>
         <p:nvSpPr>
-          <p:cNvPr id="89" name="TextBox 88"/>
-          <p:cNvSpPr txBox="1"/>
-          <p:nvPr/>
-        </p:nvSpPr>
-        <p:spPr>
-          <a:xfrm>
-            <a:off x="3802680" y="8910523"/>
+          <p:cNvPr id="93" name="TextBox 92"/>
+          <p:cNvSpPr txBox="1"/>
+          <p:nvPr/>
+        </p:nvSpPr>
+        <p:spPr>
+          <a:xfrm>
+            <a:off x="3802680" y="9262417"/>
             <a:ext cx="1603929" cy="120960"/>
           </a:xfrm>
           <a:prstGeom prst="rect">
@@ -6347,21 +6495,21 @@
                 </a:solidFill>
                 <a:latin typeface="Versos"/>
               </a:rPr>
-              <a:t>Petróleo e Gás</a:t>
-            </a:r>
-          </a:p>
-        </p:txBody>
-      </p:sp>
-      <p:sp>
-        <p:nvSpPr>
-          <p:cNvPr id="90" name="TextBox 89"/>
-          <p:cNvSpPr txBox="1"/>
-          <p:nvPr/>
-        </p:nvSpPr>
-        <p:spPr>
-          <a:xfrm>
-            <a:off x="5506396" y="8902845"/>
-            <a:ext cx="401105" cy="143640"/>
+              <a:t>Financeiro Corp</a:t>
+            </a:r>
+          </a:p>
+        </p:txBody>
+      </p:sp>
+      <p:sp>
+        <p:nvSpPr>
+          <p:cNvPr id="94" name="TextBox 93"/>
+          <p:cNvSpPr txBox="1"/>
+          <p:nvPr/>
+        </p:nvSpPr>
+        <p:spPr>
+          <a:xfrm>
+            <a:off x="5499900" y="9254621"/>
+            <a:ext cx="399508" cy="143640"/>
           </a:xfrm>
           <a:prstGeom prst="rect">
             <a:avLst/>
@@ -6384,20 +6532,20 @@
                 </a:solidFill>
                 <a:latin typeface="Versos"/>
               </a:rPr>
-              <a:t>0,60%</a:t>
-            </a:r>
-          </a:p>
-        </p:txBody>
-      </p:sp>
-      <p:sp>
-        <p:nvSpPr>
-          <p:cNvPr id="91" name="TextBox 90"/>
-          <p:cNvSpPr txBox="1"/>
-          <p:nvPr/>
-        </p:nvSpPr>
-        <p:spPr>
-          <a:xfrm>
-            <a:off x="3802680" y="9214813"/>
+              <a:t>0,38%</a:t>
+            </a:r>
+          </a:p>
+        </p:txBody>
+      </p:sp>
+      <p:sp>
+        <p:nvSpPr>
+          <p:cNvPr id="95" name="TextBox 94"/>
+          <p:cNvSpPr txBox="1"/>
+          <p:nvPr/>
+        </p:nvSpPr>
+        <p:spPr>
+          <a:xfrm>
+            <a:off x="3802680" y="9547689"/>
             <a:ext cx="1603929" cy="120960"/>
           </a:xfrm>
           <a:prstGeom prst="rect">
@@ -6421,21 +6569,21 @@
                 </a:solidFill>
                 <a:latin typeface="Versos"/>
               </a:rPr>
-              <a:t>Financeiro Corp</a:t>
-            </a:r>
-          </a:p>
-        </p:txBody>
-      </p:sp>
-      <p:sp>
-        <p:nvSpPr>
-          <p:cNvPr id="92" name="TextBox 91"/>
-          <p:cNvSpPr txBox="1"/>
-          <p:nvPr/>
-        </p:nvSpPr>
-        <p:spPr>
-          <a:xfrm>
-            <a:off x="5499900" y="9207135"/>
-            <a:ext cx="399508" cy="143640"/>
+              <a:t>Metalurgia e Siderurgia</a:t>
+            </a:r>
+          </a:p>
+        </p:txBody>
+      </p:sp>
+      <p:sp>
+        <p:nvSpPr>
+          <p:cNvPr id="96" name="TextBox 95"/>
+          <p:cNvSpPr txBox="1"/>
+          <p:nvPr/>
+        </p:nvSpPr>
+        <p:spPr>
+          <a:xfrm>
+            <a:off x="5498010" y="9539893"/>
+            <a:ext cx="394348" cy="143640"/>
           </a:xfrm>
           <a:prstGeom prst="rect">
             <a:avLst/>
@@ -6458,20 +6606,20 @@
                 </a:solidFill>
                 <a:latin typeface="Versos"/>
               </a:rPr>
-              <a:t>0,38%</a:t>
-            </a:r>
-          </a:p>
-        </p:txBody>
-      </p:sp>
-      <p:sp>
-        <p:nvSpPr>
-          <p:cNvPr id="93" name="TextBox 92"/>
-          <p:cNvSpPr txBox="1"/>
-          <p:nvPr/>
-        </p:nvSpPr>
-        <p:spPr>
-          <a:xfrm>
-            <a:off x="3802680" y="9519103"/>
+              <a:t>0,29%</a:t>
+            </a:r>
+          </a:p>
+        </p:txBody>
+      </p:sp>
+      <p:sp>
+        <p:nvSpPr>
+          <p:cNvPr id="97" name="TextBox 96"/>
+          <p:cNvSpPr txBox="1"/>
+          <p:nvPr/>
+        </p:nvSpPr>
+        <p:spPr>
+          <a:xfrm>
+            <a:off x="3802680" y="9832961"/>
             <a:ext cx="1603929" cy="120960"/>
           </a:xfrm>
           <a:prstGeom prst="rect">
@@ -6502,13 +6650,13 @@
       </p:sp>
       <p:sp>
         <p:nvSpPr>
-          <p:cNvPr id="94" name="TextBox 93"/>
-          <p:cNvSpPr txBox="1"/>
-          <p:nvPr/>
-        </p:nvSpPr>
-        <p:spPr>
-          <a:xfrm>
-            <a:off x="5498010" y="9511425"/>
+          <p:cNvPr id="98" name="TextBox 97"/>
+          <p:cNvSpPr txBox="1"/>
+          <p:nvPr/>
+        </p:nvSpPr>
+        <p:spPr>
+          <a:xfrm>
+            <a:off x="5498010" y="9825165"/>
             <a:ext cx="386117" cy="143640"/>
           </a:xfrm>
           <a:prstGeom prst="rect">
@@ -6539,81 +6687,7 @@
       </p:sp>
       <p:sp>
         <p:nvSpPr>
-          <p:cNvPr id="95" name="TextBox 94"/>
-          <p:cNvSpPr txBox="1"/>
-          <p:nvPr/>
-        </p:nvSpPr>
-        <p:spPr>
-          <a:xfrm>
-            <a:off x="3802680" y="9823393"/>
-            <a:ext cx="1603929" cy="120960"/>
-          </a:xfrm>
-          <a:prstGeom prst="rect">
-            <a:avLst/>
-          </a:prstGeom>
-          <a:noFill/>
-        </p:spPr>
-        <p:txBody>
-          <a:bodyPr wrap="none" lIns="0" rIns="0" tIns="0" bIns="0" anchor="t"/>
-          <a:lstStyle/>
-          <a:p>
-            <a:pPr algn="r">
-              <a:lnSpc>
-                <a:spcPts val="890"/>
-              </a:lnSpc>
-            </a:pPr>
-            <a:r>
-              <a:rPr sz="809" b="0" i="0">
-                <a:solidFill>
-                  <a:srgbClr val="222222"/>
-                </a:solidFill>
-                <a:latin typeface="Versos"/>
-              </a:rPr>
-              <a:t>TI e Telecomunicações</a:t>
-            </a:r>
-          </a:p>
-        </p:txBody>
-      </p:sp>
-      <p:sp>
-        <p:nvSpPr>
-          <p:cNvPr id="96" name="TextBox 95"/>
-          <p:cNvSpPr txBox="1"/>
-          <p:nvPr/>
-        </p:nvSpPr>
-        <p:spPr>
-          <a:xfrm>
-            <a:off x="5498010" y="9815715"/>
-            <a:ext cx="394225" cy="143640"/>
-          </a:xfrm>
-          <a:prstGeom prst="rect">
-            <a:avLst/>
-          </a:prstGeom>
-          <a:noFill/>
-        </p:spPr>
-        <p:txBody>
-          <a:bodyPr wrap="none" lIns="0" rIns="0" tIns="0" bIns="0" anchor="t"/>
-          <a:lstStyle/>
-          <a:p>
-            <a:pPr algn="l">
-              <a:lnSpc>
-                <a:spcPts val="1142"/>
-              </a:lnSpc>
-            </a:pPr>
-            <a:r>
-              <a:rPr sz="952" b="0" i="0">
-                <a:solidFill>
-                  <a:srgbClr val="111111"/>
-                </a:solidFill>
-                <a:latin typeface="Versos"/>
-              </a:rPr>
-              <a:t>0,05%</a:t>
-            </a:r>
-          </a:p>
-        </p:txBody>
-      </p:sp>
-      <p:sp>
-        <p:nvSpPr>
-          <p:cNvPr id="97" name="TextBox 96"/>
+          <p:cNvPr id="99" name="TextBox 98"/>
           <p:cNvSpPr txBox="1"/>
           <p:nvPr/>
         </p:nvSpPr>
